--- a/presentacion/Presentacion CWE-SANS  Top 25 - Juan Ignacio Weyrauch.pptx
+++ b/presentacion/Presentacion CWE-SANS  Top 25 - Juan Ignacio Weyrauch.pptx
@@ -5,15 +5,17 @@
     <p:sldMasterId id="2147483648" r:id="rId4"/>
   </p:sldMasterIdLst>
   <p:notesMasterIdLst>
-    <p:notesMasterId r:id="rId11"/>
+    <p:notesMasterId r:id="rId13"/>
   </p:notesMasterIdLst>
   <p:sldIdLst>
     <p:sldId id="259" r:id="rId5"/>
     <p:sldId id="310" r:id="rId6"/>
-    <p:sldId id="311" r:id="rId7"/>
-    <p:sldId id="312" r:id="rId8"/>
-    <p:sldId id="313" r:id="rId9"/>
-    <p:sldId id="314" r:id="rId10"/>
+    <p:sldId id="316" r:id="rId7"/>
+    <p:sldId id="311" r:id="rId8"/>
+    <p:sldId id="312" r:id="rId9"/>
+    <p:sldId id="315" r:id="rId10"/>
+    <p:sldId id="314" r:id="rId11"/>
+    <p:sldId id="317" r:id="rId12"/>
   </p:sldIdLst>
   <p:sldSz cx="12192000" cy="6858000"/>
   <p:notesSz cx="6858000" cy="9144000"/>
@@ -149,10 +151,12 @@
           <p14:sldIdLst>
             <p14:sldId id="259"/>
             <p14:sldId id="310"/>
+            <p14:sldId id="316"/>
             <p14:sldId id="311"/>
             <p14:sldId id="312"/>
-            <p14:sldId id="313"/>
+            <p14:sldId id="315"/>
             <p14:sldId id="314"/>
+            <p14:sldId id="317"/>
           </p14:sldIdLst>
         </p14:section>
       </p14:sectionLst>
@@ -776,7 +780,7 @@
           <a:p>
             <a:fld id="{257971A7-4F62-46F2-B2B0-65AF80B25B4C}" type="slidenum">
               <a:rPr lang="en-GB" smtClean="0"/>
-              <a:t>4</a:t>
+              <a:t>5</a:t>
             </a:fld>
             <a:endParaRPr lang="en-GB"/>
           </a:p>
@@ -796,90 +800,6 @@
 </file>
 
 <file path=ppt/notesSlides/notesSlide4.xml><?xml version="1.0" encoding="utf-8"?>
-<p:notes xmlns:a="http://schemas.openxmlformats.org/drawingml/2006/main" xmlns:r="http://schemas.openxmlformats.org/officeDocument/2006/relationships" xmlns:p="http://schemas.openxmlformats.org/presentationml/2006/main">
-  <p:cSld>
-    <p:spTree>
-      <p:nvGrpSpPr>
-        <p:cNvPr id="1" name=""/>
-        <p:cNvGrpSpPr/>
-        <p:nvPr/>
-      </p:nvGrpSpPr>
-      <p:grpSpPr>
-        <a:xfrm>
-          <a:off x="0" y="0"/>
-          <a:ext cx="0" cy="0"/>
-          <a:chOff x="0" y="0"/>
-          <a:chExt cx="0" cy="0"/>
-        </a:xfrm>
-      </p:grpSpPr>
-      <p:sp>
-        <p:nvSpPr>
-          <p:cNvPr id="2" name="Slide Image Placeholder 1"/>
-          <p:cNvSpPr>
-            <a:spLocks noGrp="1" noRot="1" noChangeAspect="1"/>
-          </p:cNvSpPr>
-          <p:nvPr>
-            <p:ph type="sldImg"/>
-          </p:nvPr>
-        </p:nvSpPr>
-        <p:spPr/>
-      </p:sp>
-      <p:sp>
-        <p:nvSpPr>
-          <p:cNvPr id="3" name="Notes Placeholder 2"/>
-          <p:cNvSpPr>
-            <a:spLocks noGrp="1"/>
-          </p:cNvSpPr>
-          <p:nvPr>
-            <p:ph type="body" idx="1"/>
-          </p:nvPr>
-        </p:nvSpPr>
-        <p:spPr/>
-        <p:txBody>
-          <a:bodyPr/>
-          <a:lstStyle/>
-          <a:p>
-            <a:endParaRPr lang="es-ES" dirty="0"/>
-          </a:p>
-        </p:txBody>
-      </p:sp>
-      <p:sp>
-        <p:nvSpPr>
-          <p:cNvPr id="4" name="Slide Number Placeholder 3"/>
-          <p:cNvSpPr>
-            <a:spLocks noGrp="1"/>
-          </p:cNvSpPr>
-          <p:nvPr>
-            <p:ph type="sldNum" sz="quarter" idx="5"/>
-          </p:nvPr>
-        </p:nvSpPr>
-        <p:spPr/>
-        <p:txBody>
-          <a:bodyPr/>
-          <a:lstStyle/>
-          <a:p>
-            <a:fld id="{257971A7-4F62-46F2-B2B0-65AF80B25B4C}" type="slidenum">
-              <a:rPr lang="en-GB" smtClean="0"/>
-              <a:t>5</a:t>
-            </a:fld>
-            <a:endParaRPr lang="en-GB"/>
-          </a:p>
-        </p:txBody>
-      </p:sp>
-    </p:spTree>
-    <p:extLst>
-      <p:ext uri="{BB962C8B-B14F-4D97-AF65-F5344CB8AC3E}">
-        <p14:creationId xmlns:p14="http://schemas.microsoft.com/office/powerpoint/2010/main" val="3850372299"/>
-      </p:ext>
-    </p:extLst>
-  </p:cSld>
-  <p:clrMapOvr>
-    <a:masterClrMapping/>
-  </p:clrMapOvr>
-</p:notes>
-</file>
-
-<file path=ppt/notesSlides/notesSlide5.xml><?xml version="1.0" encoding="utf-8"?>
 <p:notes xmlns:a="http://schemas.openxmlformats.org/drawingml/2006/main" xmlns:r="http://schemas.openxmlformats.org/officeDocument/2006/relationships" xmlns:p="http://schemas.openxmlformats.org/presentationml/2006/main">
   <p:cSld>
     <p:spTree>
@@ -968,7 +888,7 @@
           <a:p>
             <a:fld id="{257971A7-4F62-46F2-B2B0-65AF80B25B4C}" type="slidenum">
               <a:rPr lang="en-GB" smtClean="0"/>
-              <a:t>6</a:t>
+              <a:t>7</a:t>
             </a:fld>
             <a:endParaRPr lang="en-GB"/>
           </a:p>
@@ -978,6 +898,114 @@
     <p:extLst>
       <p:ext uri="{BB962C8B-B14F-4D97-AF65-F5344CB8AC3E}">
         <p14:creationId xmlns:p14="http://schemas.microsoft.com/office/powerpoint/2010/main" val="2228510064"/>
+      </p:ext>
+    </p:extLst>
+  </p:cSld>
+  <p:clrMapOvr>
+    <a:masterClrMapping/>
+  </p:clrMapOvr>
+</p:notes>
+</file>
+
+<file path=ppt/notesSlides/notesSlide5.xml><?xml version="1.0" encoding="utf-8"?>
+<p:notes xmlns:a="http://schemas.openxmlformats.org/drawingml/2006/main" xmlns:r="http://schemas.openxmlformats.org/officeDocument/2006/relationships" xmlns:p="http://schemas.openxmlformats.org/presentationml/2006/main">
+  <p:cSld>
+    <p:spTree>
+      <p:nvGrpSpPr>
+        <p:cNvPr id="1" name="">
+          <a:extLst>
+            <a:ext uri="{FF2B5EF4-FFF2-40B4-BE49-F238E27FC236}">
+              <a16:creationId xmlns:a16="http://schemas.microsoft.com/office/drawing/2014/main" id="{C7F31D4C-24C4-3710-1673-680564AD823E}"/>
+            </a:ext>
+          </a:extLst>
+        </p:cNvPr>
+        <p:cNvGrpSpPr/>
+        <p:nvPr/>
+      </p:nvGrpSpPr>
+      <p:grpSpPr>
+        <a:xfrm>
+          <a:off x="0" y="0"/>
+          <a:ext cx="0" cy="0"/>
+          <a:chOff x="0" y="0"/>
+          <a:chExt cx="0" cy="0"/>
+        </a:xfrm>
+      </p:grpSpPr>
+      <p:sp>
+        <p:nvSpPr>
+          <p:cNvPr id="2" name="Slide Image Placeholder 1">
+            <a:extLst>
+              <a:ext uri="{FF2B5EF4-FFF2-40B4-BE49-F238E27FC236}">
+                <a16:creationId xmlns:a16="http://schemas.microsoft.com/office/drawing/2014/main" id="{DD3B3896-C19E-D726-BAFF-44C61CFF0B6D}"/>
+              </a:ext>
+            </a:extLst>
+          </p:cNvPr>
+          <p:cNvSpPr>
+            <a:spLocks noGrp="1" noRot="1" noChangeAspect="1"/>
+          </p:cNvSpPr>
+          <p:nvPr>
+            <p:ph type="sldImg"/>
+          </p:nvPr>
+        </p:nvSpPr>
+        <p:spPr/>
+      </p:sp>
+      <p:sp>
+        <p:nvSpPr>
+          <p:cNvPr id="3" name="Notes Placeholder 2">
+            <a:extLst>
+              <a:ext uri="{FF2B5EF4-FFF2-40B4-BE49-F238E27FC236}">
+                <a16:creationId xmlns:a16="http://schemas.microsoft.com/office/drawing/2014/main" id="{45BCCEA8-332E-E3A8-5C18-DDE0252AA386}"/>
+              </a:ext>
+            </a:extLst>
+          </p:cNvPr>
+          <p:cNvSpPr>
+            <a:spLocks noGrp="1"/>
+          </p:cNvSpPr>
+          <p:nvPr>
+            <p:ph type="body" idx="1"/>
+          </p:nvPr>
+        </p:nvSpPr>
+        <p:spPr/>
+        <p:txBody>
+          <a:bodyPr/>
+          <a:lstStyle/>
+          <a:p>
+            <a:endParaRPr lang="es-ES" dirty="0"/>
+          </a:p>
+        </p:txBody>
+      </p:sp>
+      <p:sp>
+        <p:nvSpPr>
+          <p:cNvPr id="4" name="Slide Number Placeholder 3">
+            <a:extLst>
+              <a:ext uri="{FF2B5EF4-FFF2-40B4-BE49-F238E27FC236}">
+                <a16:creationId xmlns:a16="http://schemas.microsoft.com/office/drawing/2014/main" id="{1C7F07EF-213E-FE52-9CC1-EF2028CA8EA5}"/>
+              </a:ext>
+            </a:extLst>
+          </p:cNvPr>
+          <p:cNvSpPr>
+            <a:spLocks noGrp="1"/>
+          </p:cNvSpPr>
+          <p:nvPr>
+            <p:ph type="sldNum" sz="quarter" idx="5"/>
+          </p:nvPr>
+        </p:nvSpPr>
+        <p:spPr/>
+        <p:txBody>
+          <a:bodyPr/>
+          <a:lstStyle/>
+          <a:p>
+            <a:fld id="{257971A7-4F62-46F2-B2B0-65AF80B25B4C}" type="slidenum">
+              <a:rPr lang="en-GB" smtClean="0"/>
+              <a:t>8</a:t>
+            </a:fld>
+            <a:endParaRPr lang="en-GB"/>
+          </a:p>
+        </p:txBody>
+      </p:sp>
+    </p:spTree>
+    <p:extLst>
+      <p:ext uri="{BB962C8B-B14F-4D97-AF65-F5344CB8AC3E}">
+        <p14:creationId xmlns:p14="http://schemas.microsoft.com/office/powerpoint/2010/main" val="1600205468"/>
       </p:ext>
     </p:extLst>
   </p:cSld>
@@ -2973,14 +3001,6 @@
               <a:t>Most Dangerous Software Errors</a:t>
             </a:r>
           </a:p>
-          <a:p>
-            <a:r>
-              <a:rPr lang="en-GB" dirty="0">
-                <a:ea typeface="Roboto Light"/>
-              </a:rPr>
-              <a:t>CWE - 502</a:t>
-            </a:r>
-          </a:p>
         </p:txBody>
       </p:sp>
       <p:sp>
@@ -3091,7 +3111,7 @@
           <a:p>
             <a:r>
               <a:rPr lang="en-US" dirty="0"/>
-              <a:t>CWE-502 - </a:t>
+              <a:t>CWE-502: </a:t>
             </a:r>
             <a:br>
               <a:rPr lang="en-US" dirty="0"/>
@@ -3124,6 +3144,482 @@
 </file>
 
 <file path=ppt/slides/slide3.xml><?xml version="1.0" encoding="utf-8"?>
+<p:sld xmlns:a="http://schemas.openxmlformats.org/drawingml/2006/main" xmlns:r="http://schemas.openxmlformats.org/officeDocument/2006/relationships" xmlns:p="http://schemas.openxmlformats.org/presentationml/2006/main">
+  <p:cSld>
+    <p:spTree>
+      <p:nvGrpSpPr>
+        <p:cNvPr id="1" name=""/>
+        <p:cNvGrpSpPr/>
+        <p:nvPr/>
+      </p:nvGrpSpPr>
+      <p:grpSpPr>
+        <a:xfrm>
+          <a:off x="0" y="0"/>
+          <a:ext cx="0" cy="0"/>
+          <a:chOff x="0" y="0"/>
+          <a:chExt cx="0" cy="0"/>
+        </a:xfrm>
+      </p:grpSpPr>
+      <p:sp>
+        <p:nvSpPr>
+          <p:cNvPr id="3" name="Título 2">
+            <a:extLst>
+              <a:ext uri="{FF2B5EF4-FFF2-40B4-BE49-F238E27FC236}">
+                <a16:creationId xmlns:a16="http://schemas.microsoft.com/office/drawing/2014/main" id="{6F6EF8AD-4EE2-7C5A-731B-774C01BBBAFC}"/>
+              </a:ext>
+            </a:extLst>
+          </p:cNvPr>
+          <p:cNvSpPr>
+            <a:spLocks noGrp="1"/>
+          </p:cNvSpPr>
+          <p:nvPr>
+            <p:ph type="title"/>
+          </p:nvPr>
+        </p:nvSpPr>
+        <p:spPr/>
+        <p:txBody>
+          <a:bodyPr/>
+          <a:lstStyle/>
+          <a:p>
+            <a:r>
+              <a:rPr lang="en-US" dirty="0">
+                <a:solidFill>
+                  <a:srgbClr val="000000"/>
+                </a:solidFill>
+                <a:latin typeface="Gill Sans"/>
+              </a:rPr>
+              <a:t>CWE-502 - Deserialization of Untrusted Data</a:t>
+            </a:r>
+            <a:endParaRPr lang="en-US" dirty="0"/>
+          </a:p>
+        </p:txBody>
+      </p:sp>
+      <p:graphicFrame>
+        <p:nvGraphicFramePr>
+          <p:cNvPr id="6" name="Tabla 5">
+            <a:extLst>
+              <a:ext uri="{FF2B5EF4-FFF2-40B4-BE49-F238E27FC236}">
+                <a16:creationId xmlns:a16="http://schemas.microsoft.com/office/drawing/2014/main" id="{AB89F99A-9EBC-328B-8424-BD37F2A2ACE2}"/>
+              </a:ext>
+            </a:extLst>
+          </p:cNvPr>
+          <p:cNvGraphicFramePr>
+            <a:graphicFrameLocks noGrp="1"/>
+          </p:cNvGraphicFramePr>
+          <p:nvPr>
+            <p:extLst>
+              <p:ext uri="{D42A27DB-BD31-4B8C-83A1-F6EECF244321}">
+                <p14:modId xmlns:p14="http://schemas.microsoft.com/office/powerpoint/2010/main" val="4178273058"/>
+              </p:ext>
+            </p:extLst>
+          </p:nvPr>
+        </p:nvGraphicFramePr>
+        <p:xfrm>
+          <a:off x="757082" y="1177290"/>
+          <a:ext cx="10677834" cy="4503420"/>
+        </p:xfrm>
+        <a:graphic>
+          <a:graphicData uri="http://schemas.openxmlformats.org/drawingml/2006/table">
+            <a:tbl>
+              <a:tblPr firstRow="1" bandRow="1">
+                <a:tableStyleId>{5C22544A-7EE6-4342-B048-85BDC9FD1C3A}</a:tableStyleId>
+              </a:tblPr>
+              <a:tblGrid>
+                <a:gridCol w="5338917">
+                  <a:extLst>
+                    <a:ext uri="{9D8B030D-6E8A-4147-A177-3AD203B41FA5}">
+                      <a16:colId xmlns:a16="http://schemas.microsoft.com/office/drawing/2014/main" val="3561349617"/>
+                    </a:ext>
+                  </a:extLst>
+                </a:gridCol>
+                <a:gridCol w="5338917">
+                  <a:extLst>
+                    <a:ext uri="{9D8B030D-6E8A-4147-A177-3AD203B41FA5}">
+                      <a16:colId xmlns:a16="http://schemas.microsoft.com/office/drawing/2014/main" val="1207528233"/>
+                    </a:ext>
+                  </a:extLst>
+                </a:gridCol>
+              </a:tblGrid>
+              <a:tr h="700959">
+                <a:tc>
+                  <a:txBody>
+                    <a:bodyPr/>
+                    <a:lstStyle/>
+                    <a:p>
+                      <a:r>
+                        <a:rPr lang="es-UY" sz="2400" dirty="0"/>
+                        <a:t>Serialización</a:t>
+                      </a:r>
+                      <a:endParaRPr lang="en-US" sz="2400" dirty="0"/>
+                    </a:p>
+                  </a:txBody>
+                  <a:tcPr anchor="ctr"/>
+                </a:tc>
+                <a:tc>
+                  <a:txBody>
+                    <a:bodyPr/>
+                    <a:lstStyle/>
+                    <a:p>
+                      <a:r>
+                        <a:rPr lang="es-UY" sz="2400" dirty="0"/>
+                        <a:t>Deserialización</a:t>
+                      </a:r>
+                      <a:endParaRPr lang="en-US" dirty="0"/>
+                    </a:p>
+                  </a:txBody>
+                  <a:tcPr anchor="ctr"/>
+                </a:tc>
+                <a:extLst>
+                  <a:ext uri="{0D108BD9-81ED-4DB2-BD59-A6C34878D82A}">
+                    <a16:rowId xmlns:a16="http://schemas.microsoft.com/office/drawing/2014/main" val="324377123"/>
+                  </a:ext>
+                </a:extLst>
+              </a:tr>
+              <a:tr h="3802461">
+                <a:tc>
+                  <a:txBody>
+                    <a:bodyPr/>
+                    <a:lstStyle/>
+                    <a:p>
+                      <a:pPr marL="0" marR="0" lvl="0" indent="0" algn="l" defTabSz="914400" rtl="0" eaLnBrk="1" fontAlgn="auto" latinLnBrk="0" hangingPunct="1">
+                        <a:lnSpc>
+                          <a:spcPct val="100000"/>
+                        </a:lnSpc>
+                        <a:spcBef>
+                          <a:spcPts val="0"/>
+                        </a:spcBef>
+                        <a:spcAft>
+                          <a:spcPts val="0"/>
+                        </a:spcAft>
+                        <a:buClrTx/>
+                        <a:buSzTx/>
+                        <a:buFontTx/>
+                        <a:buNone/>
+                        <a:tabLst/>
+                        <a:defRPr/>
+                      </a:pPr>
+                      <a:endParaRPr lang="en-US" sz="1800" dirty="0"/>
+                    </a:p>
+                    <a:p>
+                      <a:pPr marL="0" marR="0" lvl="0" indent="0" algn="l" defTabSz="914400" rtl="0" eaLnBrk="1" fontAlgn="auto" latinLnBrk="0" hangingPunct="1">
+                        <a:lnSpc>
+                          <a:spcPct val="100000"/>
+                        </a:lnSpc>
+                        <a:spcBef>
+                          <a:spcPts val="0"/>
+                        </a:spcBef>
+                        <a:spcAft>
+                          <a:spcPts val="0"/>
+                        </a:spcAft>
+                        <a:buClrTx/>
+                        <a:buSzTx/>
+                        <a:buFontTx/>
+                        <a:buNone/>
+                        <a:tabLst/>
+                        <a:defRPr/>
+                      </a:pPr>
+                      <a:r>
+                        <a:rPr lang="en-US" sz="1800" dirty="0"/>
+                        <a:t>Es el </a:t>
+                      </a:r>
+                      <a:r>
+                        <a:rPr lang="en-US" sz="1800" dirty="0" err="1"/>
+                        <a:t>proceso</a:t>
+                      </a:r>
+                      <a:r>
+                        <a:rPr lang="en-US" sz="1800" dirty="0"/>
+                        <a:t> de </a:t>
+                      </a:r>
+                      <a:r>
+                        <a:rPr lang="en-US" sz="1800" dirty="0" err="1"/>
+                        <a:t>convertir</a:t>
+                      </a:r>
+                      <a:r>
+                        <a:rPr lang="en-US" sz="1800" dirty="0"/>
+                        <a:t> un </a:t>
+                      </a:r>
+                      <a:r>
+                        <a:rPr lang="en-US" sz="1800" dirty="0" err="1"/>
+                        <a:t>objeto</a:t>
+                      </a:r>
+                      <a:r>
+                        <a:rPr lang="en-US" sz="1800" dirty="0"/>
+                        <a:t> </a:t>
+                      </a:r>
+                      <a:r>
+                        <a:rPr lang="en-US" sz="1800" dirty="0" err="1"/>
+                        <a:t>en</a:t>
+                      </a:r>
+                      <a:r>
+                        <a:rPr lang="en-US" sz="1800" dirty="0"/>
+                        <a:t> memoria (</a:t>
+                      </a:r>
+                      <a:r>
+                        <a:rPr lang="en-US" sz="1800" dirty="0" err="1"/>
+                        <a:t>por</a:t>
+                      </a:r>
+                      <a:r>
+                        <a:rPr lang="en-US" sz="1800" dirty="0"/>
+                        <a:t> </a:t>
+                      </a:r>
+                      <a:r>
+                        <a:rPr lang="en-US" sz="1800" dirty="0" err="1"/>
+                        <a:t>ejemplo</a:t>
+                      </a:r>
+                      <a:r>
+                        <a:rPr lang="en-US" sz="1800" dirty="0"/>
+                        <a:t>, </a:t>
+                      </a:r>
+                      <a:r>
+                        <a:rPr lang="en-US" sz="1800" dirty="0" err="1"/>
+                        <a:t>una</a:t>
+                      </a:r>
+                      <a:r>
+                        <a:rPr lang="en-US" sz="1800" dirty="0"/>
+                        <a:t> </a:t>
+                      </a:r>
+                      <a:r>
+                        <a:rPr lang="en-US" sz="1800" dirty="0" err="1"/>
+                        <a:t>estructura</a:t>
+                      </a:r>
+                      <a:r>
+                        <a:rPr lang="en-US" sz="1800" dirty="0"/>
+                        <a:t> de </a:t>
+                      </a:r>
+                      <a:r>
+                        <a:rPr lang="en-US" sz="1800" dirty="0" err="1"/>
+                        <a:t>datos</a:t>
+                      </a:r>
+                      <a:r>
+                        <a:rPr lang="en-US" sz="1800" dirty="0"/>
+                        <a:t> o </a:t>
+                      </a:r>
+                      <a:r>
+                        <a:rPr lang="en-US" sz="1800" dirty="0" err="1"/>
+                        <a:t>una</a:t>
+                      </a:r>
+                      <a:r>
+                        <a:rPr lang="en-US" sz="1800" dirty="0"/>
+                        <a:t> </a:t>
+                      </a:r>
+                      <a:r>
+                        <a:rPr lang="en-US" sz="1800" dirty="0" err="1"/>
+                        <a:t>clase</a:t>
+                      </a:r>
+                      <a:r>
+                        <a:rPr lang="en-US" sz="1800" dirty="0"/>
+                        <a:t>) </a:t>
+                      </a:r>
+                      <a:r>
+                        <a:rPr lang="en-US" sz="1800" dirty="0" err="1"/>
+                        <a:t>en</a:t>
+                      </a:r>
+                      <a:r>
+                        <a:rPr lang="en-US" sz="1800" dirty="0"/>
+                        <a:t> un </a:t>
+                      </a:r>
+                      <a:r>
+                        <a:rPr lang="en-US" sz="1800" dirty="0" err="1"/>
+                        <a:t>flujo</a:t>
+                      </a:r>
+                      <a:r>
+                        <a:rPr lang="en-US" sz="1800" dirty="0"/>
+                        <a:t> de bytes o </a:t>
+                      </a:r>
+                      <a:r>
+                        <a:rPr lang="en-US" sz="1800" dirty="0" err="1"/>
+                        <a:t>texto</a:t>
+                      </a:r>
+                      <a:r>
+                        <a:rPr lang="en-US" sz="1800" dirty="0"/>
+                        <a:t> (</a:t>
+                      </a:r>
+                      <a:r>
+                        <a:rPr lang="en-US" sz="1800" dirty="0" err="1"/>
+                        <a:t>como</a:t>
+                      </a:r>
+                      <a:r>
+                        <a:rPr lang="en-US" sz="1800" dirty="0"/>
+                        <a:t> JSON, XML o un </a:t>
+                      </a:r>
+                      <a:r>
+                        <a:rPr lang="en-US" sz="1800" dirty="0" err="1"/>
+                        <a:t>formato</a:t>
+                      </a:r>
+                      <a:r>
+                        <a:rPr lang="en-US" sz="1800" dirty="0"/>
+                        <a:t> </a:t>
+                      </a:r>
+                      <a:r>
+                        <a:rPr lang="en-US" sz="1800" dirty="0" err="1"/>
+                        <a:t>binario</a:t>
+                      </a:r>
+                      <a:r>
+                        <a:rPr lang="en-US" sz="1800" dirty="0"/>
+                        <a:t>) para </a:t>
+                      </a:r>
+                      <a:r>
+                        <a:rPr lang="en-US" sz="1800" dirty="0" err="1"/>
+                        <a:t>guardarlo</a:t>
+                      </a:r>
+                      <a:r>
+                        <a:rPr lang="en-US" sz="1800" dirty="0"/>
+                        <a:t> </a:t>
+                      </a:r>
+                      <a:r>
+                        <a:rPr lang="en-US" sz="1800" dirty="0" err="1"/>
+                        <a:t>en</a:t>
+                      </a:r>
+                      <a:r>
+                        <a:rPr lang="en-US" sz="1800" dirty="0"/>
+                        <a:t> un </a:t>
+                      </a:r>
+                      <a:r>
+                        <a:rPr lang="en-US" sz="1800" dirty="0" err="1"/>
+                        <a:t>archivo</a:t>
+                      </a:r>
+                      <a:r>
+                        <a:rPr lang="en-US" sz="1800" dirty="0"/>
+                        <a:t> o </a:t>
+                      </a:r>
+                      <a:r>
+                        <a:rPr lang="en-US" sz="1800" dirty="0" err="1"/>
+                        <a:t>enviarlo</a:t>
+                      </a:r>
+                      <a:r>
+                        <a:rPr lang="en-US" sz="1800" dirty="0"/>
+                        <a:t> </a:t>
+                      </a:r>
+                      <a:r>
+                        <a:rPr lang="en-US" sz="1800" dirty="0" err="1"/>
+                        <a:t>por</a:t>
+                      </a:r>
+                      <a:r>
+                        <a:rPr lang="en-US" sz="1800" dirty="0"/>
+                        <a:t> la red.</a:t>
+                      </a:r>
+                    </a:p>
+                    <a:p>
+                      <a:endParaRPr lang="en-US" dirty="0"/>
+                    </a:p>
+                  </a:txBody>
+                  <a:tcPr/>
+                </a:tc>
+                <a:tc>
+                  <a:txBody>
+                    <a:bodyPr/>
+                    <a:lstStyle/>
+                    <a:p>
+                      <a:endParaRPr lang="en-US" dirty="0"/>
+                    </a:p>
+                    <a:p>
+                      <a:r>
+                        <a:rPr lang="en-US" dirty="0"/>
+                        <a:t>Es el </a:t>
+                      </a:r>
+                      <a:r>
+                        <a:rPr lang="en-US" dirty="0" err="1"/>
+                        <a:t>proceso</a:t>
+                      </a:r>
+                      <a:r>
+                        <a:rPr lang="en-US" dirty="0"/>
+                        <a:t> </a:t>
+                      </a:r>
+                      <a:r>
+                        <a:rPr lang="en-US" dirty="0" err="1"/>
+                        <a:t>inverso</a:t>
+                      </a:r>
+                      <a:r>
+                        <a:rPr lang="en-US" dirty="0"/>
+                        <a:t>; </a:t>
+                      </a:r>
+                      <a:r>
+                        <a:rPr lang="en-US" dirty="0" err="1"/>
+                        <a:t>toma</a:t>
+                      </a:r>
+                      <a:r>
+                        <a:rPr lang="en-US" dirty="0"/>
+                        <a:t> ese </a:t>
+                      </a:r>
+                      <a:r>
+                        <a:rPr lang="en-US" dirty="0" err="1"/>
+                        <a:t>flujo</a:t>
+                      </a:r>
+                      <a:r>
+                        <a:rPr lang="en-US" dirty="0"/>
+                        <a:t> de bytes y lo </a:t>
+                      </a:r>
+                      <a:r>
+                        <a:rPr lang="en-US" dirty="0" err="1"/>
+                        <a:t>reconstruye</a:t>
+                      </a:r>
+                      <a:r>
+                        <a:rPr lang="en-US" dirty="0"/>
+                        <a:t> </a:t>
+                      </a:r>
+                      <a:r>
+                        <a:rPr lang="en-US" dirty="0" err="1"/>
+                        <a:t>como</a:t>
+                      </a:r>
+                      <a:r>
+                        <a:rPr lang="en-US" dirty="0"/>
+                        <a:t> un </a:t>
+                      </a:r>
+                      <a:r>
+                        <a:rPr lang="en-US" dirty="0" err="1"/>
+                        <a:t>objeto</a:t>
+                      </a:r>
+                      <a:r>
+                        <a:rPr lang="en-US" dirty="0"/>
+                        <a:t> utilizable </a:t>
+                      </a:r>
+                      <a:r>
+                        <a:rPr lang="en-US" dirty="0" err="1"/>
+                        <a:t>en</a:t>
+                      </a:r>
+                      <a:r>
+                        <a:rPr lang="en-US" dirty="0"/>
+                        <a:t> la memoria del </a:t>
+                      </a:r>
+                      <a:r>
+                        <a:rPr lang="en-US" dirty="0" err="1"/>
+                        <a:t>programa</a:t>
+                      </a:r>
+                      <a:r>
+                        <a:rPr lang="en-US" dirty="0"/>
+                        <a:t>.</a:t>
+                      </a:r>
+                    </a:p>
+                    <a:p>
+                      <a:endParaRPr lang="en-US" dirty="0"/>
+                    </a:p>
+                  </a:txBody>
+                  <a:tcPr/>
+                </a:tc>
+                <a:extLst>
+                  <a:ext uri="{0D108BD9-81ED-4DB2-BD59-A6C34878D82A}">
+                    <a16:rowId xmlns:a16="http://schemas.microsoft.com/office/drawing/2014/main" val="3842480964"/>
+                  </a:ext>
+                </a:extLst>
+              </a:tr>
+            </a:tbl>
+          </a:graphicData>
+        </a:graphic>
+      </p:graphicFrame>
+    </p:spTree>
+    <p:extLst>
+      <p:ext uri="{BB962C8B-B14F-4D97-AF65-F5344CB8AC3E}">
+        <p14:creationId xmlns:p14="http://schemas.microsoft.com/office/powerpoint/2010/main" val="550573082"/>
+      </p:ext>
+    </p:extLst>
+  </p:cSld>
+  <p:clrMapOvr>
+    <a:masterClrMapping/>
+  </p:clrMapOvr>
+</p:sld>
+</file>
+
+<file path=ppt/slides/slide4.xml><?xml version="1.0" encoding="utf-8"?>
 <p:sld xmlns:a="http://schemas.openxmlformats.org/drawingml/2006/main" xmlns:r="http://schemas.openxmlformats.org/officeDocument/2006/relationships" xmlns:p="http://schemas.openxmlformats.org/presentationml/2006/main">
   <p:cSld>
     <p:spTree>
@@ -3529,7 +4025,7 @@
 </p:sld>
 </file>
 
-<file path=ppt/slides/slide4.xml><?xml version="1.0" encoding="utf-8"?>
+<file path=ppt/slides/slide5.xml><?xml version="1.0" encoding="utf-8"?>
 <p:sld xmlns:a="http://schemas.openxmlformats.org/drawingml/2006/main" xmlns:r="http://schemas.openxmlformats.org/officeDocument/2006/relationships" xmlns:p="http://schemas.openxmlformats.org/presentationml/2006/main">
   <p:cSld>
     <p:spTree>
@@ -3600,7 +4096,7 @@
         </p:nvSpPr>
         <p:spPr/>
         <p:txBody>
-          <a:bodyPr anchor="ctr"/>
+          <a:bodyPr anchor="t"/>
           <a:lstStyle/>
           <a:p>
             <a:r>
@@ -3612,6 +4108,21 @@
             </a:r>
           </a:p>
           <a:p>
+            <a:endParaRPr lang="es-UY" i="1" dirty="0">
+              <a:latin typeface="Myriad Pro"/>
+              <a:ea typeface="Roboto Light"/>
+            </a:endParaRPr>
+          </a:p>
+          <a:p>
+            <a:r>
+              <a:rPr lang="es-UY" sz="2000" dirty="0">
+                <a:latin typeface="Myriad Pro"/>
+                <a:ea typeface="Roboto Light"/>
+              </a:rPr>
+              <a:t>Importación de un personaje.</a:t>
+            </a:r>
+          </a:p>
+          <a:p>
             <a:endParaRPr lang="en-US" dirty="0"/>
           </a:p>
         </p:txBody>
@@ -3619,6 +4130,7 @@
       <p:sp>
         <p:nvSpPr>
           <p:cNvPr id="7" name="TextBox 6">
+            <a:hlinkClick r:id="rId3"/>
             <a:extLst>
               <a:ext uri="{FF2B5EF4-FFF2-40B4-BE49-F238E27FC236}">
                 <a16:creationId xmlns:a16="http://schemas.microsoft.com/office/drawing/2014/main" id="{848AA514-F393-E5E4-259C-201A4E92A820}"/>
@@ -3630,8 +4142,8 @@
         </p:nvSpPr>
         <p:spPr>
           <a:xfrm>
-            <a:off x="310862" y="6352143"/>
-            <a:ext cx="6093724" cy="369332"/>
+            <a:off x="310861" y="6352143"/>
+            <a:ext cx="8803641" cy="369332"/>
           </a:xfrm>
           <a:prstGeom prst="rect">
             <a:avLst/>
@@ -3650,14 +4162,7 @@
                 <a:ea typeface="Roboto Light"/>
                 <a:hlinkClick r:id="rId3"/>
               </a:rPr>
-              <a:t>https://github.com/</a:t>
-            </a:r>
-            <a:r>
-              <a:rPr lang="es-UY">
-                <a:latin typeface="Myriad Pro"/>
-                <a:ea typeface="Roboto Light"/>
-              </a:rPr>
-              <a:t> REFERENCIA DEL LA DEMO</a:t>
+              <a:t>https://github.com/Juan-Weyrauch/CWE-502-Deserialization-of-Untrusted-Data</a:t>
             </a:r>
             <a:endParaRPr lang="es-UY" dirty="0"/>
           </a:p>
@@ -3684,7 +4189,299 @@
           <a:bodyPr/>
           <a:lstStyle/>
           <a:p>
-            <a:endParaRPr lang="en-GB"/>
+            <a:pPr>
+              <a:defRPr sz="1950" b="0" i="0">
+                <a:solidFill>
+                  <a:srgbClr val="000000"/>
+                </a:solidFill>
+                <a:latin typeface="Gill Sans"/>
+                <a:ea typeface="Gill Sans"/>
+                <a:cs typeface="Gill Sans"/>
+              </a:defRPr>
+            </a:pPr>
+            <a:r>
+              <a:rPr lang="en-US" sz="2000" dirty="0">
+                <a:latin typeface="Myriad Pro"/>
+                <a:ea typeface="Roboto Light"/>
+              </a:rPr>
+              <a:t>1. Caso </a:t>
+            </a:r>
+            <a:r>
+              <a:rPr lang="en-US" sz="2000" dirty="0" err="1">
+                <a:latin typeface="Myriad Pro"/>
+                <a:ea typeface="Roboto Light"/>
+              </a:rPr>
+              <a:t>legítimo</a:t>
+            </a:r>
+            <a:endParaRPr lang="en-US" sz="2000" dirty="0">
+              <a:latin typeface="Myriad Pro"/>
+              <a:ea typeface="Roboto Light"/>
+            </a:endParaRPr>
+          </a:p>
+          <a:p>
+            <a:pPr>
+              <a:defRPr sz="1950" b="0" i="0">
+                <a:solidFill>
+                  <a:srgbClr val="000000"/>
+                </a:solidFill>
+                <a:latin typeface="Gill Sans"/>
+                <a:ea typeface="Gill Sans"/>
+                <a:cs typeface="Gill Sans"/>
+              </a:defRPr>
+            </a:pPr>
+            <a:r>
+              <a:rPr lang="en-US" sz="2000" dirty="0" err="1">
+                <a:latin typeface="Myriad Pro"/>
+                <a:ea typeface="Roboto Light"/>
+              </a:rPr>
+              <a:t>py</a:t>
+            </a:r>
+            <a:r>
+              <a:rPr lang="en-US" sz="2000" dirty="0">
+                <a:latin typeface="Myriad Pro"/>
+                <a:ea typeface="Roboto Light"/>
+              </a:rPr>
+              <a:t> demo.py vulnerable </a:t>
+            </a:r>
+            <a:r>
+              <a:rPr lang="en-US" sz="2000" dirty="0" err="1">
+                <a:latin typeface="Myriad Pro"/>
+                <a:ea typeface="Roboto Light"/>
+              </a:rPr>
+              <a:t>legitimo</a:t>
+            </a:r>
+            <a:endParaRPr lang="en-US" sz="2000" dirty="0">
+              <a:latin typeface="Myriad Pro"/>
+              <a:ea typeface="Roboto Light"/>
+            </a:endParaRPr>
+          </a:p>
+          <a:p>
+            <a:endParaRPr lang="en-US" sz="2000" dirty="0">
+              <a:latin typeface="Myriad Pro"/>
+              <a:ea typeface="Roboto Light"/>
+            </a:endParaRPr>
+          </a:p>
+          <a:p>
+            <a:pPr>
+              <a:defRPr sz="1950" b="0" i="0">
+                <a:solidFill>
+                  <a:srgbClr val="000000"/>
+                </a:solidFill>
+                <a:latin typeface="Gill Sans"/>
+                <a:ea typeface="Gill Sans"/>
+                <a:cs typeface="Gill Sans"/>
+              </a:defRPr>
+            </a:pPr>
+            <a:r>
+              <a:rPr lang="en-US" sz="2000" dirty="0">
+                <a:latin typeface="Myriad Pro"/>
+                <a:ea typeface="Roboto Light"/>
+              </a:rPr>
+              <a:t>2. Entrada </a:t>
+            </a:r>
+            <a:r>
+              <a:rPr lang="en-US" sz="2000" dirty="0" err="1">
+                <a:latin typeface="Myriad Pro"/>
+                <a:ea typeface="Roboto Light"/>
+              </a:rPr>
+              <a:t>preparada</a:t>
+            </a:r>
+            <a:endParaRPr lang="en-US" sz="2000" dirty="0">
+              <a:latin typeface="Myriad Pro"/>
+              <a:ea typeface="Roboto Light"/>
+            </a:endParaRPr>
+          </a:p>
+          <a:p>
+            <a:pPr>
+              <a:defRPr sz="1950" b="0" i="0">
+                <a:solidFill>
+                  <a:srgbClr val="000000"/>
+                </a:solidFill>
+                <a:latin typeface="Gill Sans"/>
+                <a:ea typeface="Gill Sans"/>
+                <a:cs typeface="Gill Sans"/>
+              </a:defRPr>
+            </a:pPr>
+            <a:r>
+              <a:rPr lang="en-US" sz="2000" dirty="0" err="1">
+                <a:latin typeface="Myriad Pro"/>
+                <a:ea typeface="Roboto Light"/>
+              </a:rPr>
+              <a:t>py</a:t>
+            </a:r>
+            <a:r>
+              <a:rPr lang="en-US" sz="2000" dirty="0">
+                <a:latin typeface="Myriad Pro"/>
+                <a:ea typeface="Roboto Light"/>
+              </a:rPr>
+              <a:t> demo.py vulnerable </a:t>
+            </a:r>
+            <a:r>
+              <a:rPr lang="en-US" sz="2000" dirty="0" err="1">
+                <a:latin typeface="Myriad Pro"/>
+                <a:ea typeface="Roboto Light"/>
+              </a:rPr>
+              <a:t>manipulado</a:t>
+            </a:r>
+            <a:endParaRPr lang="en-US" sz="2000" dirty="0">
+              <a:latin typeface="Myriad Pro"/>
+              <a:ea typeface="Roboto Light"/>
+            </a:endParaRPr>
+          </a:p>
+          <a:p>
+            <a:endParaRPr lang="en-US" sz="2000" dirty="0">
+              <a:latin typeface="Myriad Pro"/>
+              <a:ea typeface="Roboto Light"/>
+            </a:endParaRPr>
+          </a:p>
+          <a:p>
+            <a:pPr>
+              <a:defRPr sz="1950" b="0" i="0">
+                <a:solidFill>
+                  <a:srgbClr val="000000"/>
+                </a:solidFill>
+                <a:latin typeface="Gill Sans"/>
+                <a:ea typeface="Gill Sans"/>
+                <a:cs typeface="Gill Sans"/>
+              </a:defRPr>
+            </a:pPr>
+            <a:r>
+              <a:rPr lang="en-US" sz="2000" dirty="0">
+                <a:latin typeface="Myriad Pro"/>
+                <a:ea typeface="Roboto Light"/>
+              </a:rPr>
+              <a:t>3. </a:t>
+            </a:r>
+            <a:r>
+              <a:rPr lang="en-US" sz="2000" dirty="0" err="1">
+                <a:latin typeface="Myriad Pro"/>
+                <a:ea typeface="Roboto Light"/>
+              </a:rPr>
+              <a:t>Versión</a:t>
+            </a:r>
+            <a:r>
+              <a:rPr lang="en-US" sz="2000" dirty="0">
+                <a:latin typeface="Myriad Pro"/>
+                <a:ea typeface="Roboto Light"/>
+              </a:rPr>
+              <a:t> </a:t>
+            </a:r>
+            <a:r>
+              <a:rPr lang="en-US" sz="2000" dirty="0" err="1">
+                <a:latin typeface="Myriad Pro"/>
+                <a:ea typeface="Roboto Light"/>
+              </a:rPr>
+              <a:t>mitigada</a:t>
+            </a:r>
+            <a:endParaRPr lang="en-US" sz="2000" dirty="0">
+              <a:latin typeface="Myriad Pro"/>
+              <a:ea typeface="Roboto Light"/>
+            </a:endParaRPr>
+          </a:p>
+          <a:p>
+            <a:pPr>
+              <a:defRPr sz="1950" b="0" i="0">
+                <a:solidFill>
+                  <a:srgbClr val="000000"/>
+                </a:solidFill>
+                <a:latin typeface="Gill Sans"/>
+                <a:ea typeface="Gill Sans"/>
+                <a:cs typeface="Gill Sans"/>
+              </a:defRPr>
+            </a:pPr>
+            <a:r>
+              <a:rPr lang="en-US" sz="2000" dirty="0" err="1">
+                <a:latin typeface="Myriad Pro"/>
+                <a:ea typeface="Roboto Light"/>
+              </a:rPr>
+              <a:t>py</a:t>
+            </a:r>
+            <a:r>
+              <a:rPr lang="en-US" sz="2000" dirty="0">
+                <a:latin typeface="Myriad Pro"/>
+                <a:ea typeface="Roboto Light"/>
+              </a:rPr>
+              <a:t> demo.py </a:t>
+            </a:r>
+            <a:r>
+              <a:rPr lang="en-US" sz="2000" dirty="0" err="1">
+                <a:latin typeface="Myriad Pro"/>
+                <a:ea typeface="Roboto Light"/>
+              </a:rPr>
+              <a:t>mitigado</a:t>
+            </a:r>
+            <a:r>
+              <a:rPr lang="en-US" sz="2000" dirty="0">
+                <a:latin typeface="Myriad Pro"/>
+                <a:ea typeface="Roboto Light"/>
+              </a:rPr>
+              <a:t> </a:t>
+            </a:r>
+            <a:r>
+              <a:rPr lang="en-US" sz="2000" dirty="0" err="1">
+                <a:latin typeface="Myriad Pro"/>
+                <a:ea typeface="Roboto Light"/>
+              </a:rPr>
+              <a:t>legitimo</a:t>
+            </a:r>
+            <a:endParaRPr lang="en-US" sz="2000" dirty="0">
+              <a:latin typeface="Myriad Pro"/>
+              <a:ea typeface="Roboto Light"/>
+            </a:endParaRPr>
+          </a:p>
+          <a:p>
+            <a:pPr>
+              <a:defRPr sz="1950" b="0" i="0">
+                <a:solidFill>
+                  <a:srgbClr val="000000"/>
+                </a:solidFill>
+                <a:latin typeface="Gill Sans"/>
+                <a:ea typeface="Gill Sans"/>
+                <a:cs typeface="Gill Sans"/>
+              </a:defRPr>
+            </a:pPr>
+            <a:r>
+              <a:rPr lang="en-US" sz="2000" dirty="0" err="1">
+                <a:latin typeface="Myriad Pro"/>
+                <a:ea typeface="Roboto Light"/>
+              </a:rPr>
+              <a:t>py</a:t>
+            </a:r>
+            <a:r>
+              <a:rPr lang="en-US" sz="2000" dirty="0">
+                <a:latin typeface="Myriad Pro"/>
+                <a:ea typeface="Roboto Light"/>
+              </a:rPr>
+              <a:t> demo.py </a:t>
+            </a:r>
+            <a:r>
+              <a:rPr lang="en-US" sz="2000" dirty="0" err="1">
+                <a:latin typeface="Myriad Pro"/>
+                <a:ea typeface="Roboto Light"/>
+              </a:rPr>
+              <a:t>mitigado</a:t>
+            </a:r>
+            <a:r>
+              <a:rPr lang="en-US" sz="2000" dirty="0">
+                <a:latin typeface="Myriad Pro"/>
+                <a:ea typeface="Roboto Light"/>
+              </a:rPr>
+              <a:t> </a:t>
+            </a:r>
+            <a:r>
+              <a:rPr lang="en-US" sz="2000" dirty="0" err="1">
+                <a:latin typeface="Myriad Pro"/>
+                <a:ea typeface="Roboto Light"/>
+              </a:rPr>
+              <a:t>texto</a:t>
+            </a:r>
+            <a:endParaRPr lang="en-US" sz="2000" dirty="0">
+              <a:latin typeface="Myriad Pro"/>
+              <a:ea typeface="Roboto Light"/>
+            </a:endParaRPr>
+          </a:p>
+          <a:p>
+            <a:endParaRPr lang="en-GB" dirty="0"/>
           </a:p>
         </p:txBody>
       </p:sp>
@@ -3701,7 +4498,7 @@
 </p:sld>
 </file>
 
-<file path=ppt/slides/slide5.xml><?xml version="1.0" encoding="utf-8"?>
+<file path=ppt/slides/slide6.xml><?xml version="1.0" encoding="utf-8"?>
 <p:sld xmlns:a="http://schemas.openxmlformats.org/drawingml/2006/main" xmlns:r="http://schemas.openxmlformats.org/officeDocument/2006/relationships" xmlns:p="http://schemas.openxmlformats.org/presentationml/2006/main">
   <p:cSld>
     <p:spTree>
@@ -3720,10 +4517,10 @@
       </p:grpSpPr>
       <p:sp>
         <p:nvSpPr>
-          <p:cNvPr id="2" name="Title 1">
+          <p:cNvPr id="2" name="Título 1">
             <a:extLst>
               <a:ext uri="{FF2B5EF4-FFF2-40B4-BE49-F238E27FC236}">
-                <a16:creationId xmlns:a16="http://schemas.microsoft.com/office/drawing/2014/main" id="{0BFBFBA0-E581-AA01-D8EF-0A621609C41B}"/>
+                <a16:creationId xmlns:a16="http://schemas.microsoft.com/office/drawing/2014/main" id="{0D9122E2-1E51-375E-D7BF-B0F7B6056336}"/>
               </a:ext>
             </a:extLst>
           </p:cNvPr>
@@ -3748,67 +4545,16 @@
               </a:rPr>
               <a:t>CWE-502 - Deserialization of Untrusted Data</a:t>
             </a:r>
-            <a:endParaRPr lang="es-UY" dirty="0"/>
+            <a:endParaRPr lang="en-US" dirty="0"/>
           </a:p>
         </p:txBody>
       </p:sp>
       <p:sp>
         <p:nvSpPr>
-          <p:cNvPr id="8" name="Content Placeholder 7">
+          <p:cNvPr id="3" name="Marcador de contenido 2">
             <a:extLst>
               <a:ext uri="{FF2B5EF4-FFF2-40B4-BE49-F238E27FC236}">
-                <a16:creationId xmlns:a16="http://schemas.microsoft.com/office/drawing/2014/main" id="{07CCB4C6-0EF8-92E1-C298-F57A54C667E9}"/>
-              </a:ext>
-            </a:extLst>
-          </p:cNvPr>
-          <p:cNvSpPr>
-            <a:spLocks noGrp="1"/>
-          </p:cNvSpPr>
-          <p:nvPr>
-            <p:ph sz="half" idx="10"/>
-          </p:nvPr>
-        </p:nvSpPr>
-        <p:spPr>
-          <a:xfrm>
-            <a:off x="5956975" y="1268082"/>
-            <a:ext cx="5911025" cy="4787661"/>
-          </a:xfrm>
-        </p:spPr>
-        <p:txBody>
-          <a:bodyPr/>
-          <a:lstStyle/>
-          <a:p>
-            <a:r>
-              <a:rPr lang="en-US" dirty="0">
-                <a:ea typeface="Roboto Light"/>
-                <a:cs typeface="Calibri"/>
-              </a:rPr>
-              <a:t>PPT de </a:t>
-            </a:r>
-            <a:r>
-              <a:rPr lang="en-US" dirty="0" err="1">
-                <a:ea typeface="Roboto Light"/>
-                <a:cs typeface="Calibri"/>
-              </a:rPr>
-              <a:t>apoyo</a:t>
-            </a:r>
-            <a:r>
-              <a:rPr lang="en-US" dirty="0">
-                <a:ea typeface="Roboto Light"/>
-                <a:cs typeface="Calibri"/>
-              </a:rPr>
-              <a:t> a la demo</a:t>
-            </a:r>
-            <a:endParaRPr lang="en-US" dirty="0"/>
-          </a:p>
-        </p:txBody>
-      </p:sp>
-      <p:sp>
-        <p:nvSpPr>
-          <p:cNvPr id="10" name="Content Placeholder 9">
-            <a:extLst>
-              <a:ext uri="{FF2B5EF4-FFF2-40B4-BE49-F238E27FC236}">
-                <a16:creationId xmlns:a16="http://schemas.microsoft.com/office/drawing/2014/main" id="{1D72B510-4AB8-ADCC-44B7-01F39726C841}"/>
+                <a16:creationId xmlns:a16="http://schemas.microsoft.com/office/drawing/2014/main" id="{417BFEE3-1A83-B03F-260E-51132AD03F90}"/>
               </a:ext>
             </a:extLst>
           </p:cNvPr>
@@ -3819,40 +4565,36 @@
             <p:ph sz="half" idx="1"/>
           </p:nvPr>
         </p:nvSpPr>
-        <p:spPr/>
+        <p:spPr>
+          <a:xfrm>
+            <a:off x="3442724" y="2227059"/>
+            <a:ext cx="5306552" cy="2403881"/>
+          </a:xfrm>
+        </p:spPr>
         <p:txBody>
           <a:bodyPr/>
           <a:lstStyle/>
           <a:p>
-            <a:r>
-              <a:rPr lang="en-GB" dirty="0">
-                <a:ea typeface="Roboto Light"/>
-                <a:cs typeface="Calibri"/>
-              </a:rPr>
-              <a:t>PPT de </a:t>
-            </a:r>
-            <a:r>
-              <a:rPr lang="en-GB" dirty="0" err="1">
-                <a:ea typeface="Roboto Light"/>
-                <a:cs typeface="Calibri"/>
-              </a:rPr>
-              <a:t>apoyo</a:t>
-            </a:r>
-            <a:r>
-              <a:rPr lang="en-GB" dirty="0">
-                <a:ea typeface="Roboto Light"/>
-                <a:cs typeface="Calibri"/>
-              </a:rPr>
-              <a:t> a la demo</a:t>
-            </a:r>
-            <a:endParaRPr lang="en-GB" dirty="0"/>
+            <a:pPr algn="ctr"/>
+            <a:r>
+              <a:rPr lang="es-UY" sz="5400" dirty="0"/>
+              <a:t>Mitigaciones </a:t>
+            </a:r>
+          </a:p>
+          <a:p>
+            <a:pPr algn="ctr"/>
+            <a:r>
+              <a:rPr lang="es-UY" sz="5400" dirty="0"/>
+              <a:t>y recomendaciones</a:t>
+            </a:r>
+            <a:endParaRPr lang="en-US" sz="5400" dirty="0"/>
           </a:p>
         </p:txBody>
       </p:sp>
     </p:spTree>
     <p:extLst>
       <p:ext uri="{BB962C8B-B14F-4D97-AF65-F5344CB8AC3E}">
-        <p14:creationId xmlns:p14="http://schemas.microsoft.com/office/powerpoint/2010/main" val="1868092574"/>
+        <p14:creationId xmlns:p14="http://schemas.microsoft.com/office/powerpoint/2010/main" val="254106549"/>
       </p:ext>
     </p:extLst>
   </p:cSld>
@@ -3862,7 +4604,7 @@
 </p:sld>
 </file>
 
-<file path=ppt/slides/slide6.xml><?xml version="1.0" encoding="utf-8"?>
+<file path=ppt/slides/slide7.xml><?xml version="1.0" encoding="utf-8"?>
 <p:sld xmlns:a="http://schemas.openxmlformats.org/drawingml/2006/main" xmlns:r="http://schemas.openxmlformats.org/officeDocument/2006/relationships" xmlns:p="http://schemas.openxmlformats.org/presentationml/2006/main">
   <p:cSld>
     <p:spTree>
@@ -3885,12 +4627,486 @@
           <a:chExt cx="0" cy="0"/>
         </a:xfrm>
       </p:grpSpPr>
+      <p:graphicFrame>
+        <p:nvGraphicFramePr>
+          <p:cNvPr id="7" name="Marcador de contenido 6">
+            <a:extLst>
+              <a:ext uri="{FF2B5EF4-FFF2-40B4-BE49-F238E27FC236}">
+                <a16:creationId xmlns:a16="http://schemas.microsoft.com/office/drawing/2014/main" id="{7F92A926-8435-5FA0-F46F-E485C9504986}"/>
+              </a:ext>
+            </a:extLst>
+          </p:cNvPr>
+          <p:cNvGraphicFramePr>
+            <a:graphicFrameLocks noGrp="1"/>
+          </p:cNvGraphicFramePr>
+          <p:nvPr>
+            <p:ph sz="half" idx="10"/>
+            <p:extLst>
+              <p:ext uri="{D42A27DB-BD31-4B8C-83A1-F6EECF244321}">
+                <p14:modId xmlns:p14="http://schemas.microsoft.com/office/powerpoint/2010/main" val="2031224547"/>
+              </p:ext>
+            </p:extLst>
+          </p:nvPr>
+        </p:nvGraphicFramePr>
+        <p:xfrm>
+          <a:off x="396465" y="317499"/>
+          <a:ext cx="11399070" cy="5670348"/>
+        </p:xfrm>
+        <a:graphic>
+          <a:graphicData uri="http://schemas.openxmlformats.org/drawingml/2006/table">
+            <a:tbl>
+              <a:tblPr firstRow="1" bandRow="1">
+                <a:tableStyleId>{5C22544A-7EE6-4342-B048-85BDC9FD1C3A}</a:tableStyleId>
+              </a:tblPr>
+              <a:tblGrid>
+                <a:gridCol w="4873625">
+                  <a:extLst>
+                    <a:ext uri="{9D8B030D-6E8A-4147-A177-3AD203B41FA5}">
+                      <a16:colId xmlns:a16="http://schemas.microsoft.com/office/drawing/2014/main" val="1491148936"/>
+                    </a:ext>
+                  </a:extLst>
+                </a:gridCol>
+                <a:gridCol w="6525445">
+                  <a:extLst>
+                    <a:ext uri="{9D8B030D-6E8A-4147-A177-3AD203B41FA5}">
+                      <a16:colId xmlns:a16="http://schemas.microsoft.com/office/drawing/2014/main" val="4268144299"/>
+                    </a:ext>
+                  </a:extLst>
+                </a:gridCol>
+              </a:tblGrid>
+              <a:tr h="409837">
+                <a:tc>
+                  <a:txBody>
+                    <a:bodyPr/>
+                    <a:lstStyle/>
+                    <a:p>
+                      <a:r>
+                        <a:rPr lang="en-US" dirty="0" err="1"/>
+                        <a:t>Mitigaci</a:t>
+                      </a:r>
+                      <a:r>
+                        <a:rPr lang="es-UY" dirty="0" err="1"/>
+                        <a:t>ón</a:t>
+                      </a:r>
+                      <a:endParaRPr lang="en-US" dirty="0"/>
+                    </a:p>
+                  </a:txBody>
+                  <a:tcPr/>
+                </a:tc>
+                <a:tc>
+                  <a:txBody>
+                    <a:bodyPr/>
+                    <a:lstStyle/>
+                    <a:p>
+                      <a:r>
+                        <a:rPr lang="es-UY" dirty="0"/>
+                        <a:t>Explicación</a:t>
+                      </a:r>
+                      <a:endParaRPr lang="en-US" dirty="0"/>
+                    </a:p>
+                  </a:txBody>
+                  <a:tcPr/>
+                </a:tc>
+                <a:extLst>
+                  <a:ext uri="{0D108BD9-81ED-4DB2-BD59-A6C34878D82A}">
+                    <a16:rowId xmlns:a16="http://schemas.microsoft.com/office/drawing/2014/main" val="4250739671"/>
+                  </a:ext>
+                </a:extLst>
+              </a:tr>
+              <a:tr h="1010557">
+                <a:tc>
+                  <a:txBody>
+                    <a:bodyPr/>
+                    <a:lstStyle/>
+                    <a:p>
+                      <a:r>
+                        <a:rPr lang="es-UY" dirty="0"/>
+                        <a:t>Verificar firmas o HMAC</a:t>
+                      </a:r>
+                      <a:endParaRPr lang="en-US" dirty="0"/>
+                    </a:p>
+                  </a:txBody>
+                  <a:tcPr/>
+                </a:tc>
+                <a:tc>
+                  <a:txBody>
+                    <a:bodyPr/>
+                    <a:lstStyle/>
+                    <a:p>
+                      <a:r>
+                        <a:rPr lang="es-ES" dirty="0"/>
+                        <a:t>Comprobar que los datos no fueron alterados, antes de </a:t>
+                      </a:r>
+                      <a:r>
+                        <a:rPr lang="es-ES" dirty="0" err="1"/>
+                        <a:t>deserializarlos</a:t>
+                      </a:r>
+                      <a:r>
+                        <a:rPr lang="es-ES" dirty="0"/>
+                        <a:t>. Requiere proteger las claves y confiar en quien genera los mensajes. (</a:t>
+                      </a:r>
+                      <a:r>
+                        <a:rPr lang="en-US" sz="1800" b="0" i="0" kern="1200" dirty="0">
+                          <a:solidFill>
+                            <a:schemeClr val="dk1"/>
+                          </a:solidFill>
+                          <a:effectLst/>
+                          <a:latin typeface="+mn-lt"/>
+                          <a:ea typeface="+mn-ea"/>
+                          <a:cs typeface="+mn-cs"/>
+                        </a:rPr>
+                        <a:t>hash-based message authentication code)</a:t>
+                      </a:r>
+                      <a:endParaRPr lang="en-US" dirty="0"/>
+                    </a:p>
+                  </a:txBody>
+                  <a:tcPr/>
+                </a:tc>
+                <a:extLst>
+                  <a:ext uri="{0D108BD9-81ED-4DB2-BD59-A6C34878D82A}">
+                    <a16:rowId xmlns:a16="http://schemas.microsoft.com/office/drawing/2014/main" val="2438676219"/>
+                  </a:ext>
+                </a:extLst>
+              </a:tr>
+              <a:tr h="707390">
+                <a:tc>
+                  <a:txBody>
+                    <a:bodyPr/>
+                    <a:lstStyle/>
+                    <a:p>
+                      <a:r>
+                        <a:rPr lang="es-UY" b="1" dirty="0"/>
+                        <a:t>Construir un objeto nuevo con datos variables</a:t>
+                      </a:r>
+                      <a:endParaRPr lang="en-US" b="1" dirty="0"/>
+                    </a:p>
+                  </a:txBody>
+                  <a:tcPr/>
+                </a:tc>
+                <a:tc>
+                  <a:txBody>
+                    <a:bodyPr/>
+                    <a:lstStyle/>
+                    <a:p>
+                      <a:r>
+                        <a:rPr lang="es-ES" dirty="0"/>
+                        <a:t>Leer los datos de forma segura, comprobarlos y crear el objeto desde el código de la aplicación.</a:t>
+                      </a:r>
+                      <a:endParaRPr lang="en-US" dirty="0"/>
+                    </a:p>
+                  </a:txBody>
+                  <a:tcPr/>
+                </a:tc>
+                <a:extLst>
+                  <a:ext uri="{0D108BD9-81ED-4DB2-BD59-A6C34878D82A}">
+                    <a16:rowId xmlns:a16="http://schemas.microsoft.com/office/drawing/2014/main" val="3035868835"/>
+                  </a:ext>
+                </a:extLst>
+              </a:tr>
+              <a:tr h="409837">
+                <a:tc>
+                  <a:txBody>
+                    <a:bodyPr/>
+                    <a:lstStyle/>
+                    <a:p>
+                      <a:r>
+                        <a:rPr lang="es-UY" dirty="0"/>
+                        <a:t>Impedir la deserialización de ciertas clases</a:t>
+                      </a:r>
+                      <a:endParaRPr lang="en-US" dirty="0"/>
+                    </a:p>
+                  </a:txBody>
+                  <a:tcPr/>
+                </a:tc>
+                <a:tc>
+                  <a:txBody>
+                    <a:bodyPr/>
+                    <a:lstStyle/>
+                    <a:p>
+                      <a:r>
+                        <a:rPr lang="es-ES" dirty="0"/>
+                        <a:t>Rechazar su reconstrucción cuando no debería permitirse. </a:t>
+                      </a:r>
+                      <a:endParaRPr lang="en-US" dirty="0"/>
+                    </a:p>
+                  </a:txBody>
+                  <a:tcPr/>
+                </a:tc>
+                <a:extLst>
+                  <a:ext uri="{0D108BD9-81ED-4DB2-BD59-A6C34878D82A}">
+                    <a16:rowId xmlns:a16="http://schemas.microsoft.com/office/drawing/2014/main" val="127320454"/>
+                  </a:ext>
+                </a:extLst>
+              </a:tr>
+              <a:tr h="707390">
+                <a:tc>
+                  <a:txBody>
+                    <a:bodyPr/>
+                    <a:lstStyle/>
+                    <a:p>
+                      <a:r>
+                        <a:rPr lang="es-UY" dirty="0"/>
+                        <a:t>Excluir campos sensibles</a:t>
+                      </a:r>
+                      <a:endParaRPr lang="en-US" dirty="0"/>
+                    </a:p>
+                  </a:txBody>
+                  <a:tcPr/>
+                </a:tc>
+                <a:tc>
+                  <a:txBody>
+                    <a:bodyPr/>
+                    <a:lstStyle/>
+                    <a:p>
+                      <a:r>
+                        <a:rPr lang="es-ES" dirty="0"/>
+                        <a:t>Evitar que ciertos atributos se guarden y restauren mediante serialización. Por ejemplo, usando </a:t>
+                      </a:r>
+                      <a:r>
+                        <a:rPr lang="es-ES" dirty="0" err="1"/>
+                        <a:t>transient</a:t>
+                      </a:r>
+                      <a:r>
+                        <a:rPr lang="es-ES" dirty="0"/>
+                        <a:t> en Java.</a:t>
+                      </a:r>
+                      <a:endParaRPr lang="en-US" dirty="0"/>
+                    </a:p>
+                  </a:txBody>
+                  <a:tcPr/>
+                </a:tc>
+                <a:extLst>
+                  <a:ext uri="{0D108BD9-81ED-4DB2-BD59-A6C34878D82A}">
+                    <a16:rowId xmlns:a16="http://schemas.microsoft.com/office/drawing/2014/main" val="4223740094"/>
+                  </a:ext>
+                </a:extLst>
+              </a:tr>
+              <a:tr h="1010557">
+                <a:tc>
+                  <a:txBody>
+                    <a:bodyPr/>
+                    <a:lstStyle/>
+                    <a:p>
+                      <a:r>
+                        <a:rPr lang="es-UY" dirty="0"/>
+                        <a:t>Limitar las clases disponibles y permitidas</a:t>
+                      </a:r>
+                      <a:endParaRPr lang="en-US" dirty="0"/>
+                    </a:p>
+                  </a:txBody>
+                  <a:tcPr/>
+                </a:tc>
+                <a:tc>
+                  <a:txBody>
+                    <a:bodyPr/>
+                    <a:lstStyle/>
+                    <a:p>
+                      <a:r>
+                        <a:rPr lang="es-ES" dirty="0"/>
+                        <a:t>Aceptar solo los tipos necesarios y reducir componentes aprovechables para activar llamadas peligrosas. Una lista permitida, por sí sola, no garantiza seguridad.</a:t>
+                      </a:r>
+                      <a:endParaRPr lang="en-US" dirty="0"/>
+                    </a:p>
+                  </a:txBody>
+                  <a:tcPr/>
+                </a:tc>
+                <a:extLst>
+                  <a:ext uri="{0D108BD9-81ED-4DB2-BD59-A6C34878D82A}">
+                    <a16:rowId xmlns:a16="http://schemas.microsoft.com/office/drawing/2014/main" val="1889238795"/>
+                  </a:ext>
+                </a:extLst>
+              </a:tr>
+              <a:tr h="707390">
+                <a:tc>
+                  <a:txBody>
+                    <a:bodyPr/>
+                    <a:lstStyle/>
+                    <a:p>
+                      <a:r>
+                        <a:rPr lang="es-UY" dirty="0"/>
+                        <a:t>Aplicar protección criptográfica</a:t>
+                      </a:r>
+                      <a:endParaRPr lang="en-US" dirty="0"/>
+                    </a:p>
+                  </a:txBody>
+                  <a:tcPr/>
+                </a:tc>
+                <a:tc>
+                  <a:txBody>
+                    <a:bodyPr/>
+                    <a:lstStyle/>
+                    <a:p>
+                      <a:r>
+                        <a:rPr lang="es-ES" dirty="0"/>
+                        <a:t>Proteger datos o código. Si la protección depende de un cliente comprometido, puede perder su eficacia.</a:t>
+                      </a:r>
+                      <a:endParaRPr lang="en-US" dirty="0"/>
+                    </a:p>
+                  </a:txBody>
+                  <a:tcPr/>
+                </a:tc>
+                <a:extLst>
+                  <a:ext uri="{0D108BD9-81ED-4DB2-BD59-A6C34878D82A}">
+                    <a16:rowId xmlns:a16="http://schemas.microsoft.com/office/drawing/2014/main" val="3224555972"/>
+                  </a:ext>
+                </a:extLst>
+              </a:tr>
+              <a:tr h="707390">
+                <a:tc>
+                  <a:txBody>
+                    <a:bodyPr/>
+                    <a:lstStyle/>
+                    <a:p>
+                      <a:r>
+                        <a:rPr lang="es-UY" dirty="0"/>
+                        <a:t>Usar firewall de aplicación</a:t>
+                      </a:r>
+                      <a:endParaRPr lang="en-US" dirty="0"/>
+                    </a:p>
+                  </a:txBody>
+                  <a:tcPr/>
+                </a:tc>
+                <a:tc>
+                  <a:txBody>
+                    <a:bodyPr/>
+                    <a:lstStyle/>
+                    <a:p>
+                      <a:r>
+                        <a:rPr lang="en-US" dirty="0" err="1"/>
+                        <a:t>Filtrar</a:t>
+                      </a:r>
+                      <a:r>
+                        <a:rPr lang="en-US" dirty="0"/>
+                        <a:t> </a:t>
+                      </a:r>
+                      <a:r>
+                        <a:rPr lang="en-US" dirty="0" err="1"/>
+                        <a:t>posibles</a:t>
+                      </a:r>
+                      <a:r>
+                        <a:rPr lang="en-US" dirty="0"/>
+                        <a:t> </a:t>
+                      </a:r>
+                      <a:r>
+                        <a:rPr lang="en-US" dirty="0" err="1"/>
+                        <a:t>ataques</a:t>
+                      </a:r>
+                      <a:r>
+                        <a:rPr lang="en-US" dirty="0"/>
+                        <a:t> </a:t>
+                      </a:r>
+                      <a:r>
+                        <a:rPr lang="en-US" dirty="0" err="1"/>
+                        <a:t>como</a:t>
+                      </a:r>
+                      <a:r>
+                        <a:rPr lang="en-US" dirty="0"/>
+                        <a:t> defensa </a:t>
+                      </a:r>
+                      <a:r>
+                        <a:rPr lang="en-US" dirty="0" err="1"/>
+                        <a:t>adicional</a:t>
+                      </a:r>
+                      <a:r>
+                        <a:rPr lang="en-US" dirty="0"/>
+                        <a:t> o temporal. </a:t>
+                      </a:r>
+                      <a:r>
+                        <a:rPr lang="en-US" dirty="0" err="1"/>
+                        <a:t>Puede</a:t>
+                      </a:r>
+                      <a:r>
+                        <a:rPr lang="en-US" dirty="0"/>
+                        <a:t> </a:t>
+                      </a:r>
+                      <a:r>
+                        <a:rPr lang="en-US" dirty="0" err="1"/>
+                        <a:t>dejar</a:t>
+                      </a:r>
+                      <a:r>
+                        <a:rPr lang="en-US" dirty="0"/>
+                        <a:t> pasar </a:t>
+                      </a:r>
+                      <a:r>
+                        <a:rPr lang="en-US" dirty="0" err="1"/>
+                        <a:t>ataques</a:t>
+                      </a:r>
+                      <a:r>
+                        <a:rPr lang="en-US" dirty="0"/>
+                        <a:t> o </a:t>
+                      </a:r>
+                      <a:r>
+                        <a:rPr lang="en-US" dirty="0" err="1"/>
+                        <a:t>bloquear</a:t>
+                      </a:r>
+                      <a:r>
+                        <a:rPr lang="en-US" dirty="0"/>
+                        <a:t> entradas </a:t>
+                      </a:r>
+                      <a:r>
+                        <a:rPr lang="en-US" dirty="0" err="1"/>
+                        <a:t>legítimas</a:t>
+                      </a:r>
+                      <a:r>
+                        <a:rPr lang="en-US" dirty="0"/>
+                        <a:t>.</a:t>
+                      </a:r>
+                    </a:p>
+                  </a:txBody>
+                  <a:tcPr/>
+                </a:tc>
+                <a:extLst>
+                  <a:ext uri="{0D108BD9-81ED-4DB2-BD59-A6C34878D82A}">
+                    <a16:rowId xmlns:a16="http://schemas.microsoft.com/office/drawing/2014/main" val="3560771537"/>
+                  </a:ext>
+                </a:extLst>
+              </a:tr>
+            </a:tbl>
+          </a:graphicData>
+        </a:graphic>
+      </p:graphicFrame>
+    </p:spTree>
+    <p:extLst>
+      <p:ext uri="{BB962C8B-B14F-4D97-AF65-F5344CB8AC3E}">
+        <p14:creationId xmlns:p14="http://schemas.microsoft.com/office/powerpoint/2010/main" val="2448337552"/>
+      </p:ext>
+    </p:extLst>
+  </p:cSld>
+  <p:clrMapOvr>
+    <a:masterClrMapping/>
+  </p:clrMapOvr>
+</p:sld>
+</file>
+
+<file path=ppt/slides/slide8.xml><?xml version="1.0" encoding="utf-8"?>
+<p:sld xmlns:a="http://schemas.openxmlformats.org/drawingml/2006/main" xmlns:r="http://schemas.openxmlformats.org/officeDocument/2006/relationships" xmlns:p="http://schemas.openxmlformats.org/presentationml/2006/main">
+  <p:cSld>
+    <p:spTree>
+      <p:nvGrpSpPr>
+        <p:cNvPr id="1" name="">
+          <a:extLst>
+            <a:ext uri="{FF2B5EF4-FFF2-40B4-BE49-F238E27FC236}">
+              <a16:creationId xmlns:a16="http://schemas.microsoft.com/office/drawing/2014/main" id="{807AE782-4BC5-7411-0B3D-A1DA338219CB}"/>
+            </a:ext>
+          </a:extLst>
+        </p:cNvPr>
+        <p:cNvGrpSpPr/>
+        <p:nvPr/>
+      </p:nvGrpSpPr>
+      <p:grpSpPr>
+        <a:xfrm>
+          <a:off x="0" y="0"/>
+          <a:ext cx="0" cy="0"/>
+          <a:chOff x="0" y="0"/>
+          <a:chExt cx="0" cy="0"/>
+        </a:xfrm>
+      </p:grpSpPr>
       <p:sp>
         <p:nvSpPr>
-          <p:cNvPr id="2" name="Title 1">
+          <p:cNvPr id="4" name="Title 3">
             <a:extLst>
               <a:ext uri="{FF2B5EF4-FFF2-40B4-BE49-F238E27FC236}">
-                <a16:creationId xmlns:a16="http://schemas.microsoft.com/office/drawing/2014/main" id="{34F553AB-9EF0-1B01-D4C8-737DD54FB8F7}"/>
+                <a16:creationId xmlns:a16="http://schemas.microsoft.com/office/drawing/2014/main" id="{D78C5805-9D1F-781B-C698-EDC2DBD57B39}"/>
               </a:ext>
             </a:extLst>
           </p:cNvPr>
@@ -3907,88 +5123,37 @@
           <a:lstStyle/>
           <a:p>
             <a:r>
-              <a:rPr lang="en-US" dirty="0">
-                <a:solidFill>
-                  <a:srgbClr val="000000"/>
-                </a:solidFill>
-                <a:latin typeface="Gill Sans"/>
-              </a:rPr>
-              <a:t>CWE-502 - Deserialization of Untrusted Data</a:t>
-            </a:r>
-            <a:endParaRPr lang="es-UY" b="0" dirty="0">
-              <a:latin typeface="Gill Sans"/>
-            </a:endParaRPr>
-          </a:p>
-        </p:txBody>
-      </p:sp>
-      <p:sp>
-        <p:nvSpPr>
-          <p:cNvPr id="6" name="Content Placeholder 5">
-            <a:extLst>
-              <a:ext uri="{FF2B5EF4-FFF2-40B4-BE49-F238E27FC236}">
-                <a16:creationId xmlns:a16="http://schemas.microsoft.com/office/drawing/2014/main" id="{427E48AD-067E-64AE-E77B-15D0BA83E9B3}"/>
-              </a:ext>
-            </a:extLst>
-          </p:cNvPr>
-          <p:cNvSpPr>
-            <a:spLocks noGrp="1"/>
-          </p:cNvSpPr>
-          <p:nvPr>
-            <p:ph sz="half" idx="10"/>
-          </p:nvPr>
-        </p:nvSpPr>
-        <p:spPr/>
-        <p:txBody>
-          <a:bodyPr/>
-          <a:lstStyle/>
-          <a:p>
-            <a:endParaRPr lang="en-GB"/>
-          </a:p>
-        </p:txBody>
-      </p:sp>
-      <p:sp>
-        <p:nvSpPr>
-          <p:cNvPr id="19" name="Content Placeholder 18">
-            <a:extLst>
-              <a:ext uri="{FF2B5EF4-FFF2-40B4-BE49-F238E27FC236}">
-                <a16:creationId xmlns:a16="http://schemas.microsoft.com/office/drawing/2014/main" id="{84339A09-DADD-9BA7-6271-ACF6C38FDB1B}"/>
-              </a:ext>
-            </a:extLst>
-          </p:cNvPr>
-          <p:cNvSpPr>
-            <a:spLocks noGrp="1"/>
-          </p:cNvSpPr>
-          <p:nvPr>
-            <p:ph sz="half" idx="1"/>
-          </p:nvPr>
-        </p:nvSpPr>
-        <p:spPr/>
-        <p:txBody>
-          <a:bodyPr/>
-          <a:lstStyle/>
-          <a:p>
-            <a:r>
-              <a:rPr lang="en-GB" dirty="0">
-                <a:ea typeface="Roboto Light"/>
-                <a:cs typeface="Calibri"/>
-              </a:rPr>
-              <a:t>Mitigaciones y </a:t>
-            </a:r>
-            <a:r>
-              <a:rPr lang="en-GB" dirty="0" err="1">
-                <a:ea typeface="Roboto Light"/>
-                <a:cs typeface="Calibri"/>
-              </a:rPr>
-              <a:t>recomendaciones</a:t>
-            </a:r>
-            <a:endParaRPr lang="en-GB" dirty="0" err="1"/>
+              <a:rPr lang="en-US" dirty="0"/>
+              <a:t>Gracias </a:t>
+            </a:r>
+            <a:r>
+              <a:rPr lang="en-US" dirty="0" err="1"/>
+              <a:t>por</a:t>
+            </a:r>
+            <a:r>
+              <a:rPr lang="en-US" dirty="0"/>
+              <a:t> </a:t>
+            </a:r>
+            <a:r>
+              <a:rPr lang="en-US" dirty="0" err="1"/>
+              <a:t>su</a:t>
+            </a:r>
+            <a:r>
+              <a:rPr lang="en-US" dirty="0"/>
+              <a:t> </a:t>
+            </a:r>
+            <a:r>
+              <a:rPr lang="en-US" dirty="0" err="1"/>
+              <a:t>atención</a:t>
+            </a:r>
+            <a:endParaRPr lang="en-US" dirty="0"/>
           </a:p>
         </p:txBody>
       </p:sp>
     </p:spTree>
     <p:extLst>
       <p:ext uri="{BB962C8B-B14F-4D97-AF65-F5344CB8AC3E}">
-        <p14:creationId xmlns:p14="http://schemas.microsoft.com/office/powerpoint/2010/main" val="2448337552"/>
+        <p14:creationId xmlns:p14="http://schemas.microsoft.com/office/powerpoint/2010/main" val="2423336182"/>
       </p:ext>
     </p:extLst>
   </p:cSld>
@@ -4584,17 +5749,6 @@
 </file>
 
 <file path=customXml/item2.xml><?xml version="1.0" encoding="utf-8"?>
-<p:properties xmlns:p="http://schemas.microsoft.com/office/2006/metadata/properties" xmlns:xsi="http://www.w3.org/2001/XMLSchema-instance" xmlns:pc="http://schemas.microsoft.com/office/infopath/2007/PartnerControls">
-  <documentManagement>
-    <TaxCatchAll xmlns="b515cc93-823d-49e8-800c-c05db2f17c28" xsi:nil="true"/>
-    <lcf76f155ced4ddcb4097134ff3c332f xmlns="bd4eda2a-3846-448a-b7a7-16e4dd1728c0">
-      <Terms xmlns="http://schemas.microsoft.com/office/infopath/2007/PartnerControls"/>
-    </lcf76f155ced4ddcb4097134ff3c332f>
-  </documentManagement>
-</p:properties>
-</file>
-
-<file path=customXml/item3.xml><?xml version="1.0" encoding="utf-8"?>
 <ct:contentTypeSchema xmlns:ct="http://schemas.microsoft.com/office/2006/metadata/contentType" xmlns:ma="http://schemas.microsoft.com/office/2006/metadata/properties/metaAttributes" ct:_="" ma:_="" ma:contentTypeName="Document" ma:contentTypeID="0x0101006F8CA2CDEE0E8F4CACF6B95D3EF4C3B3" ma:contentTypeVersion="10" ma:contentTypeDescription="Create a new document." ma:contentTypeScope="" ma:versionID="73cc914fdf7996e7a618a83ebac81fd4">
   <xsd:schema xmlns:xsd="http://www.w3.org/2001/XMLSchema" xmlns:xs="http://www.w3.org/2001/XMLSchema" xmlns:p="http://schemas.microsoft.com/office/2006/metadata/properties" xmlns:ns2="bd4eda2a-3846-448a-b7a7-16e4dd1728c0" xmlns:ns3="b515cc93-823d-49e8-800c-c05db2f17c28" targetNamespace="http://schemas.microsoft.com/office/2006/metadata/properties" ma:root="true" ma:fieldsID="ca03da4c0f32a0ae05fe5bd68ee5a7b2" ns2:_="" ns3:_="">
     <xsd:import namespace="bd4eda2a-3846-448a-b7a7-16e4dd1728c0"/>
@@ -4783,6 +5937,17 @@
 </ct:contentTypeSchema>
 </file>
 
+<file path=customXml/item3.xml><?xml version="1.0" encoding="utf-8"?>
+<p:properties xmlns:p="http://schemas.microsoft.com/office/2006/metadata/properties" xmlns:xsi="http://www.w3.org/2001/XMLSchema-instance" xmlns:pc="http://schemas.microsoft.com/office/infopath/2007/PartnerControls">
+  <documentManagement>
+    <TaxCatchAll xmlns="b515cc93-823d-49e8-800c-c05db2f17c28" xsi:nil="true"/>
+    <lcf76f155ced4ddcb4097134ff3c332f xmlns="bd4eda2a-3846-448a-b7a7-16e4dd1728c0">
+      <Terms xmlns="http://schemas.microsoft.com/office/infopath/2007/PartnerControls"/>
+    </lcf76f155ced4ddcb4097134ff3c332f>
+  </documentManagement>
+</p:properties>
+</file>
+
 <file path=customXml/itemProps1.xml><?xml version="1.0" encoding="utf-8"?>
 <ds:datastoreItem xmlns:ds="http://schemas.openxmlformats.org/officeDocument/2006/customXml" ds:itemID="{67F3C360-5A75-47F3-9C9D-34508B1338D5}">
   <ds:schemaRefs>
@@ -4792,23 +5957,6 @@
 </file>
 
 <file path=customXml/itemProps2.xml><?xml version="1.0" encoding="utf-8"?>
-<ds:datastoreItem xmlns:ds="http://schemas.openxmlformats.org/officeDocument/2006/customXml" ds:itemID="{32BA519C-7729-414F-A3E6-40E37993701E}">
-  <ds:schemaRefs>
-    <ds:schemaRef ds:uri="http://purl.org/dc/terms/"/>
-    <ds:schemaRef ds:uri="http://schemas.microsoft.com/office/2006/documentManagement/types"/>
-    <ds:schemaRef ds:uri="b515cc93-823d-49e8-800c-c05db2f17c28"/>
-    <ds:schemaRef ds:uri="http://schemas.microsoft.com/office/infopath/2007/PartnerControls"/>
-    <ds:schemaRef ds:uri="http://purl.org/dc/dcmitype/"/>
-    <ds:schemaRef ds:uri="http://schemas.openxmlformats.org/package/2006/metadata/core-properties"/>
-    <ds:schemaRef ds:uri="http://purl.org/dc/elements/1.1/"/>
-    <ds:schemaRef ds:uri="bd4eda2a-3846-448a-b7a7-16e4dd1728c0"/>
-    <ds:schemaRef ds:uri="http://schemas.microsoft.com/office/2006/metadata/properties"/>
-    <ds:schemaRef ds:uri="http://www.w3.org/XML/1998/namespace"/>
-  </ds:schemaRefs>
-</ds:datastoreItem>
-</file>
-
-<file path=customXml/itemProps3.xml><?xml version="1.0" encoding="utf-8"?>
 <ds:datastoreItem xmlns:ds="http://schemas.openxmlformats.org/officeDocument/2006/customXml" ds:itemID="{E47596A9-359D-4684-8B47-659099474EFA}">
   <ds:schemaRefs>
     <ds:schemaRef ds:uri="http://schemas.microsoft.com/office/2006/metadata/contentType"/>
@@ -4825,4 +5973,21 @@
     <ds:schemaRef ds:uri="http://schemas.microsoft.com/internal/obd"/>
   </ds:schemaRefs>
 </ds:datastoreItem>
+</file>
+
+<file path=customXml/itemProps3.xml><?xml version="1.0" encoding="utf-8"?>
+<ds:datastoreItem xmlns:ds="http://schemas.openxmlformats.org/officeDocument/2006/customXml" ds:itemID="{32BA519C-7729-414F-A3E6-40E37993701E}">
+  <ds:schemaRefs>
+    <ds:schemaRef ds:uri="http://purl.org/dc/terms/"/>
+    <ds:schemaRef ds:uri="http://schemas.microsoft.com/office/2006/documentManagement/types"/>
+    <ds:schemaRef ds:uri="b515cc93-823d-49e8-800c-c05db2f17c28"/>
+    <ds:schemaRef ds:uri="http://schemas.microsoft.com/office/infopath/2007/PartnerControls"/>
+    <ds:schemaRef ds:uri="http://purl.org/dc/dcmitype/"/>
+    <ds:schemaRef ds:uri="http://schemas.openxmlformats.org/package/2006/metadata/core-properties"/>
+    <ds:schemaRef ds:uri="http://purl.org/dc/elements/1.1/"/>
+    <ds:schemaRef ds:uri="bd4eda2a-3846-448a-b7a7-16e4dd1728c0"/>
+    <ds:schemaRef ds:uri="http://schemas.microsoft.com/office/2006/metadata/properties"/>
+    <ds:schemaRef ds:uri="http://www.w3.org/XML/1998/namespace"/>
+  </ds:schemaRefs>
+</ds:datastoreItem>
 </file>